--- a/RAG System Architecture.pptx
+++ b/RAG System Architecture.pptx
@@ -5215,7 +5215,7 @@
     <p:bg>
       <p:bgPr>
         <a:solidFill>
-          <a:srgbClr val="0F172A"/>
+          <a:srgbClr val="FFFFFF"/>
         </a:solidFill>
         <a:effectLst/>
       </p:bgPr>
@@ -5227,6 +5227,1846 @@
         <p:nvPr/>
       </p:nvGrpSpPr>
       <p:grpSpPr/>
+      <p:sp>
+        <p:nvSpPr>
+          <p:cNvPr id="2" name="Rounded Rectangle 1"/>
+          <p:cNvSpPr/>
+          <p:nvPr/>
+        </p:nvSpPr>
+        <p:spPr>
+          <a:xfrm>
+            <a:off x="609600" y="1104900"/>
+            <a:ext cx="10972800" cy="5295900"/>
+          </a:xfrm>
+          <a:prstGeom prst="roundRect">
+            <a:avLst>
+              <a:gd name="adj" fmla="val 2158"/>
+            </a:avLst>
+          </a:prstGeom>
+          <a:solidFill>
+            <a:srgbClr val="F8FAFC"/>
+          </a:solidFill>
+          <a:ln w="19050">
+            <a:solidFill>
+              <a:srgbClr val="E2E8F0"/>
+            </a:solidFill>
+          </a:ln>
+          <a:effectLst/>
+        </p:spPr>
+        <p:style>
+          <a:lnRef idx="1">
+            <a:schemeClr val="accent1"/>
+          </a:lnRef>
+          <a:fillRef idx="3">
+            <a:schemeClr val="accent1"/>
+          </a:fillRef>
+          <a:effectRef idx="2">
+            <a:schemeClr val="accent1"/>
+          </a:effectRef>
+          <a:fontRef idx="minor">
+            <a:schemeClr val="lt1"/>
+          </a:fontRef>
+        </p:style>
+        <p:txBody>
+          <a:bodyPr rtlCol="0" anchor="ctr"/>
+          <a:lstStyle/>
+          <a:p>
+            <a:pPr algn="ctr"/>
+          </a:p>
+        </p:txBody>
+      </p:sp>
+      <p:sp>
+        <p:nvSpPr>
+          <p:cNvPr id="3" name="Rectangle 2"/>
+          <p:cNvSpPr/>
+          <p:nvPr/>
+        </p:nvSpPr>
+        <p:spPr>
+          <a:xfrm>
+            <a:off x="933450" y="5562600"/>
+            <a:ext cx="10325100" cy="590550"/>
+          </a:xfrm>
+          <a:prstGeom prst="rect">
+            <a:avLst/>
+          </a:prstGeom>
+          <a:noFill/>
+          <a:ln>
+            <a:noFill/>
+          </a:ln>
+          <a:effectLst/>
+        </p:spPr>
+        <p:style>
+          <a:lnRef idx="1">
+            <a:schemeClr val="accent1"/>
+          </a:lnRef>
+          <a:fillRef idx="3">
+            <a:schemeClr val="accent1"/>
+          </a:fillRef>
+          <a:effectRef idx="2">
+            <a:schemeClr val="accent1"/>
+          </a:effectRef>
+          <a:fontRef idx="minor">
+            <a:schemeClr val="lt1"/>
+          </a:fontRef>
+        </p:style>
+        <p:txBody>
+          <a:bodyPr rtlCol="0" anchor="ctr"/>
+          <a:lstStyle/>
+          <a:p>
+            <a:pPr algn="ctr"/>
+          </a:p>
+        </p:txBody>
+      </p:sp>
+      <p:sp>
+        <p:nvSpPr>
+          <p:cNvPr id="4" name="Rounded Rectangle 3"/>
+          <p:cNvSpPr/>
+          <p:nvPr/>
+        </p:nvSpPr>
+        <p:spPr>
+          <a:xfrm>
+            <a:off x="2457450" y="2847975"/>
+            <a:ext cx="1308794" cy="1066800"/>
+          </a:xfrm>
+          <a:prstGeom prst="roundRect">
+            <a:avLst>
+              <a:gd name="adj" fmla="val 7142"/>
+            </a:avLst>
+          </a:prstGeom>
+          <a:solidFill>
+            <a:srgbClr val="FFFFFF"/>
+          </a:solidFill>
+          <a:ln w="19050">
+            <a:solidFill>
+              <a:srgbClr val="CBD5E1"/>
+            </a:solidFill>
+          </a:ln>
+          <a:effectLst/>
+        </p:spPr>
+        <p:style>
+          <a:lnRef idx="1">
+            <a:schemeClr val="accent1"/>
+          </a:lnRef>
+          <a:fillRef idx="3">
+            <a:schemeClr val="accent1"/>
+          </a:fillRef>
+          <a:effectRef idx="2">
+            <a:schemeClr val="accent1"/>
+          </a:effectRef>
+          <a:fontRef idx="minor">
+            <a:schemeClr val="lt1"/>
+          </a:fontRef>
+        </p:style>
+        <p:txBody>
+          <a:bodyPr rtlCol="0" anchor="ctr"/>
+          <a:lstStyle/>
+          <a:p>
+            <a:pPr algn="ctr"/>
+          </a:p>
+        </p:txBody>
+      </p:sp>
+      <p:sp>
+        <p:nvSpPr>
+          <p:cNvPr id="5" name="Rounded Rectangle 4"/>
+          <p:cNvSpPr/>
+          <p:nvPr/>
+        </p:nvSpPr>
+        <p:spPr>
+          <a:xfrm>
+            <a:off x="4642544" y="2847975"/>
+            <a:ext cx="1308794" cy="1066800"/>
+          </a:xfrm>
+          <a:prstGeom prst="roundRect">
+            <a:avLst>
+              <a:gd name="adj" fmla="val 7142"/>
+            </a:avLst>
+          </a:prstGeom>
+          <a:solidFill>
+            <a:srgbClr val="FFFFFF"/>
+          </a:solidFill>
+          <a:ln w="19050">
+            <a:solidFill>
+              <a:srgbClr val="CBD5E1"/>
+            </a:solidFill>
+          </a:ln>
+          <a:effectLst/>
+        </p:spPr>
+        <p:style>
+          <a:lnRef idx="1">
+            <a:schemeClr val="accent1"/>
+          </a:lnRef>
+          <a:fillRef idx="3">
+            <a:schemeClr val="accent1"/>
+          </a:fillRef>
+          <a:effectRef idx="2">
+            <a:schemeClr val="accent1"/>
+          </a:effectRef>
+          <a:fontRef idx="minor">
+            <a:schemeClr val="lt1"/>
+          </a:fontRef>
+        </p:style>
+        <p:txBody>
+          <a:bodyPr rtlCol="0" anchor="ctr"/>
+          <a:lstStyle/>
+          <a:p>
+            <a:pPr algn="ctr"/>
+          </a:p>
+        </p:txBody>
+      </p:sp>
+      <p:sp>
+        <p:nvSpPr>
+          <p:cNvPr id="6" name="Rounded Rectangle 5"/>
+          <p:cNvSpPr/>
+          <p:nvPr/>
+        </p:nvSpPr>
+        <p:spPr>
+          <a:xfrm>
+            <a:off x="6941939" y="2562225"/>
+            <a:ext cx="1501973" cy="1638300"/>
+          </a:xfrm>
+          <a:prstGeom prst="roundRect">
+            <a:avLst>
+              <a:gd name="adj" fmla="val 5073"/>
+            </a:avLst>
+          </a:prstGeom>
+          <a:solidFill>
+            <a:srgbClr val="E0F2FE"/>
+          </a:solidFill>
+          <a:ln w="19050">
+            <a:solidFill>
+              <a:srgbClr val="0284C7"/>
+            </a:solidFill>
+          </a:ln>
+          <a:effectLst/>
+        </p:spPr>
+        <p:style>
+          <a:lnRef idx="1">
+            <a:schemeClr val="accent1"/>
+          </a:lnRef>
+          <a:fillRef idx="3">
+            <a:schemeClr val="accent1"/>
+          </a:fillRef>
+          <a:effectRef idx="2">
+            <a:schemeClr val="accent1"/>
+          </a:effectRef>
+          <a:fontRef idx="minor">
+            <a:schemeClr val="lt1"/>
+          </a:fontRef>
+        </p:style>
+        <p:txBody>
+          <a:bodyPr rtlCol="0" anchor="ctr"/>
+          <a:lstStyle/>
+          <a:p>
+            <a:pPr algn="ctr"/>
+          </a:p>
+        </p:txBody>
+      </p:sp>
+      <p:sp>
+        <p:nvSpPr>
+          <p:cNvPr id="7" name="Rectangle 6"/>
+          <p:cNvSpPr/>
+          <p:nvPr/>
+        </p:nvSpPr>
+        <p:spPr>
+          <a:xfrm>
+            <a:off x="933450" y="5562600"/>
+            <a:ext cx="10325100" cy="19050"/>
+          </a:xfrm>
+          <a:prstGeom prst="rect">
+            <a:avLst/>
+          </a:prstGeom>
+          <a:solidFill>
+            <a:srgbClr val="CBD5E1"/>
+          </a:solidFill>
+          <a:ln>
+            <a:noFill/>
+          </a:ln>
+          <a:effectLst/>
+        </p:spPr>
+        <p:style>
+          <a:lnRef idx="1">
+            <a:schemeClr val="accent1"/>
+          </a:lnRef>
+          <a:fillRef idx="3">
+            <a:schemeClr val="accent1"/>
+          </a:fillRef>
+          <a:effectRef idx="2">
+            <a:schemeClr val="accent1"/>
+          </a:effectRef>
+          <a:fontRef idx="minor">
+            <a:schemeClr val="lt1"/>
+          </a:fontRef>
+        </p:style>
+        <p:txBody>
+          <a:bodyPr rtlCol="0" anchor="ctr"/>
+          <a:lstStyle/>
+          <a:p>
+            <a:pPr algn="ctr"/>
+          </a:p>
+        </p:txBody>
+      </p:sp>
+      <p:sp>
+        <p:nvSpPr>
+          <p:cNvPr id="8" name="Rounded Rectangle 7"/>
+          <p:cNvSpPr/>
+          <p:nvPr/>
+        </p:nvSpPr>
+        <p:spPr>
+          <a:xfrm>
+            <a:off x="2038350" y="5810250"/>
+            <a:ext cx="1279624" cy="342900"/>
+          </a:xfrm>
+          <a:prstGeom prst="roundRect">
+            <a:avLst>
+              <a:gd name="adj" fmla="val 11111"/>
+            </a:avLst>
+          </a:prstGeom>
+          <a:solidFill>
+            <a:srgbClr val="FFFFFF"/>
+          </a:solidFill>
+          <a:ln w="9525">
+            <a:solidFill>
+              <a:srgbClr val="CBD5E1"/>
+            </a:solidFill>
+          </a:ln>
+          <a:effectLst/>
+        </p:spPr>
+        <p:style>
+          <a:lnRef idx="1">
+            <a:schemeClr val="accent1"/>
+          </a:lnRef>
+          <a:fillRef idx="3">
+            <a:schemeClr val="accent1"/>
+          </a:fillRef>
+          <a:effectRef idx="2">
+            <a:schemeClr val="accent1"/>
+          </a:effectRef>
+          <a:fontRef idx="minor">
+            <a:schemeClr val="lt1"/>
+          </a:fontRef>
+        </p:style>
+        <p:txBody>
+          <a:bodyPr rtlCol="0" anchor="ctr"/>
+          <a:lstStyle/>
+          <a:p>
+            <a:pPr algn="ctr"/>
+          </a:p>
+        </p:txBody>
+      </p:sp>
+      <p:sp>
+        <p:nvSpPr>
+          <p:cNvPr id="9" name="Rounded Rectangle 8"/>
+          <p:cNvSpPr/>
+          <p:nvPr/>
+        </p:nvSpPr>
+        <p:spPr>
+          <a:xfrm>
+            <a:off x="3741390" y="5810250"/>
+            <a:ext cx="2190750" cy="342900"/>
+          </a:xfrm>
+          <a:prstGeom prst="roundRect">
+            <a:avLst>
+              <a:gd name="adj" fmla="val 11111"/>
+            </a:avLst>
+          </a:prstGeom>
+          <a:solidFill>
+            <a:srgbClr val="FFFFFF"/>
+          </a:solidFill>
+          <a:ln w="9525">
+            <a:solidFill>
+              <a:srgbClr val="CBD5E1"/>
+            </a:solidFill>
+          </a:ln>
+          <a:effectLst/>
+        </p:spPr>
+        <p:style>
+          <a:lnRef idx="1">
+            <a:schemeClr val="accent1"/>
+          </a:lnRef>
+          <a:fillRef idx="3">
+            <a:schemeClr val="accent1"/>
+          </a:fillRef>
+          <a:effectRef idx="2">
+            <a:schemeClr val="accent1"/>
+          </a:effectRef>
+          <a:fontRef idx="minor">
+            <a:schemeClr val="lt1"/>
+          </a:fontRef>
+        </p:style>
+        <p:txBody>
+          <a:bodyPr rtlCol="0" anchor="ctr"/>
+          <a:lstStyle/>
+          <a:p>
+            <a:pPr algn="ctr"/>
+          </a:p>
+        </p:txBody>
+      </p:sp>
+      <p:sp>
+        <p:nvSpPr>
+          <p:cNvPr id="10" name="Rounded Rectangle 9"/>
+          <p:cNvSpPr/>
+          <p:nvPr/>
+        </p:nvSpPr>
+        <p:spPr>
+          <a:xfrm>
+            <a:off x="9326909" y="2200275"/>
+            <a:ext cx="1931789" cy="1085850"/>
+          </a:xfrm>
+          <a:prstGeom prst="roundRect">
+            <a:avLst>
+              <a:gd name="adj" fmla="val 7017"/>
+            </a:avLst>
+          </a:prstGeom>
+          <a:solidFill>
+            <a:srgbClr val="FFFFFF"/>
+          </a:solidFill>
+          <a:ln w="9525">
+            <a:solidFill>
+              <a:srgbClr val="CBD5E1"/>
+            </a:solidFill>
+          </a:ln>
+          <a:effectLst/>
+        </p:spPr>
+        <p:style>
+          <a:lnRef idx="1">
+            <a:schemeClr val="accent1"/>
+          </a:lnRef>
+          <a:fillRef idx="3">
+            <a:schemeClr val="accent1"/>
+          </a:fillRef>
+          <a:effectRef idx="2">
+            <a:schemeClr val="accent1"/>
+          </a:effectRef>
+          <a:fontRef idx="minor">
+            <a:schemeClr val="lt1"/>
+          </a:fontRef>
+        </p:style>
+        <p:txBody>
+          <a:bodyPr rtlCol="0" anchor="ctr"/>
+          <a:lstStyle/>
+          <a:p>
+            <a:pPr algn="ctr"/>
+          </a:p>
+        </p:txBody>
+      </p:sp>
+      <p:sp>
+        <p:nvSpPr>
+          <p:cNvPr id="11" name="Rounded Rectangle 10"/>
+          <p:cNvSpPr/>
+          <p:nvPr/>
+        </p:nvSpPr>
+        <p:spPr>
+          <a:xfrm>
+            <a:off x="9326909" y="3438525"/>
+            <a:ext cx="1931789" cy="1123950"/>
+          </a:xfrm>
+          <a:prstGeom prst="roundRect">
+            <a:avLst>
+              <a:gd name="adj" fmla="val 6779"/>
+            </a:avLst>
+          </a:prstGeom>
+          <a:solidFill>
+            <a:srgbClr val="FFFFFF"/>
+          </a:solidFill>
+          <a:ln w="9525">
+            <a:solidFill>
+              <a:srgbClr val="CBD5E1"/>
+            </a:solidFill>
+          </a:ln>
+          <a:effectLst/>
+        </p:spPr>
+        <p:style>
+          <a:lnRef idx="1">
+            <a:schemeClr val="accent1"/>
+          </a:lnRef>
+          <a:fillRef idx="3">
+            <a:schemeClr val="accent1"/>
+          </a:fillRef>
+          <a:effectRef idx="2">
+            <a:schemeClr val="accent1"/>
+          </a:effectRef>
+          <a:fontRef idx="minor">
+            <a:schemeClr val="lt1"/>
+          </a:fontRef>
+        </p:style>
+        <p:txBody>
+          <a:bodyPr rtlCol="0" anchor="ctr"/>
+          <a:lstStyle/>
+          <a:p>
+            <a:pPr algn="ctr"/>
+          </a:p>
+        </p:txBody>
+      </p:sp>
+      <p:sp>
+        <p:nvSpPr>
+          <p:cNvPr id="12" name="Rectangle 11"/>
+          <p:cNvSpPr/>
+          <p:nvPr/>
+        </p:nvSpPr>
+        <p:spPr>
+          <a:xfrm>
+            <a:off x="9450734" y="2324100"/>
+            <a:ext cx="846832" cy="838200"/>
+          </a:xfrm>
+          <a:prstGeom prst="rect">
+            <a:avLst/>
+          </a:prstGeom>
+          <a:noFill/>
+          <a:ln>
+            <a:noFill/>
+          </a:ln>
+          <a:effectLst/>
+        </p:spPr>
+        <p:style>
+          <a:lnRef idx="1">
+            <a:schemeClr val="accent1"/>
+          </a:lnRef>
+          <a:fillRef idx="3">
+            <a:schemeClr val="accent1"/>
+          </a:fillRef>
+          <a:effectRef idx="2">
+            <a:schemeClr val="accent1"/>
+          </a:effectRef>
+          <a:fontRef idx="minor">
+            <a:schemeClr val="lt1"/>
+          </a:fontRef>
+        </p:style>
+        <p:txBody>
+          <a:bodyPr rtlCol="0" anchor="ctr"/>
+          <a:lstStyle/>
+          <a:p>
+            <a:pPr algn="ctr"/>
+          </a:p>
+        </p:txBody>
+      </p:sp>
+      <p:sp>
+        <p:nvSpPr>
+          <p:cNvPr id="13" name="Rectangle 12"/>
+          <p:cNvSpPr/>
+          <p:nvPr/>
+        </p:nvSpPr>
+        <p:spPr>
+          <a:xfrm>
+            <a:off x="9450734" y="3562350"/>
+            <a:ext cx="846832" cy="876300"/>
+          </a:xfrm>
+          <a:prstGeom prst="rect">
+            <a:avLst/>
+          </a:prstGeom>
+          <a:noFill/>
+          <a:ln>
+            <a:noFill/>
+          </a:ln>
+          <a:effectLst/>
+        </p:spPr>
+        <p:style>
+          <a:lnRef idx="1">
+            <a:schemeClr val="accent1"/>
+          </a:lnRef>
+          <a:fillRef idx="3">
+            <a:schemeClr val="accent1"/>
+          </a:fillRef>
+          <a:effectRef idx="2">
+            <a:schemeClr val="accent1"/>
+          </a:effectRef>
+          <a:fontRef idx="minor">
+            <a:schemeClr val="lt1"/>
+          </a:fontRef>
+        </p:style>
+        <p:txBody>
+          <a:bodyPr rtlCol="0" anchor="ctr"/>
+          <a:lstStyle/>
+          <a:p>
+            <a:pPr algn="ctr"/>
+          </a:p>
+        </p:txBody>
+      </p:sp>
+      <p:sp>
+        <p:nvSpPr>
+          <p:cNvPr id="14" name="Rectangle 13"/>
+          <p:cNvSpPr/>
+          <p:nvPr/>
+        </p:nvSpPr>
+        <p:spPr>
+          <a:xfrm>
+            <a:off x="10288041" y="2324100"/>
+            <a:ext cx="9525" cy="838200"/>
+          </a:xfrm>
+          <a:prstGeom prst="rect">
+            <a:avLst/>
+          </a:prstGeom>
+          <a:solidFill>
+            <a:srgbClr val="CBD5E1"/>
+          </a:solidFill>
+          <a:ln>
+            <a:noFill/>
+          </a:ln>
+          <a:effectLst/>
+        </p:spPr>
+        <p:style>
+          <a:lnRef idx="1">
+            <a:schemeClr val="accent1"/>
+          </a:lnRef>
+          <a:fillRef idx="3">
+            <a:schemeClr val="accent1"/>
+          </a:fillRef>
+          <a:effectRef idx="2">
+            <a:schemeClr val="accent1"/>
+          </a:effectRef>
+          <a:fontRef idx="minor">
+            <a:schemeClr val="lt1"/>
+          </a:fontRef>
+        </p:style>
+        <p:txBody>
+          <a:bodyPr rtlCol="0" anchor="ctr"/>
+          <a:lstStyle/>
+          <a:p>
+            <a:pPr algn="ctr"/>
+          </a:p>
+        </p:txBody>
+      </p:sp>
+      <p:sp>
+        <p:nvSpPr>
+          <p:cNvPr id="15" name="Rectangle 14"/>
+          <p:cNvSpPr/>
+          <p:nvPr/>
+        </p:nvSpPr>
+        <p:spPr>
+          <a:xfrm>
+            <a:off x="10288041" y="3562350"/>
+            <a:ext cx="9525" cy="876300"/>
+          </a:xfrm>
+          <a:prstGeom prst="rect">
+            <a:avLst/>
+          </a:prstGeom>
+          <a:solidFill>
+            <a:srgbClr val="CBD5E1"/>
+          </a:solidFill>
+          <a:ln>
+            <a:noFill/>
+          </a:ln>
+          <a:effectLst/>
+        </p:spPr>
+        <p:style>
+          <a:lnRef idx="1">
+            <a:schemeClr val="accent1"/>
+          </a:lnRef>
+          <a:fillRef idx="3">
+            <a:schemeClr val="accent1"/>
+          </a:fillRef>
+          <a:effectRef idx="2">
+            <a:schemeClr val="accent1"/>
+          </a:effectRef>
+          <a:fontRef idx="minor">
+            <a:schemeClr val="lt1"/>
+          </a:fontRef>
+        </p:style>
+        <p:txBody>
+          <a:bodyPr rtlCol="0" anchor="ctr"/>
+          <a:lstStyle/>
+          <a:p>
+            <a:pPr algn="ctr"/>
+          </a:p>
+        </p:txBody>
+      </p:sp>
+      <p:pic>
+        <p:nvPicPr>
+          <p:cNvPr id="16" name="Picture 15" descr="image.png"/>
+          <p:cNvPicPr>
+            <a:picLocks noChangeAspect="1"/>
+          </p:cNvPicPr>
+          <p:nvPr/>
+        </p:nvPicPr>
+        <p:blipFill>
+          <a:blip r:embed="rId2"/>
+          <a:stretch>
+            <a:fillRect/>
+          </a:stretch>
+        </p:blipFill>
+        <p:spPr>
+          <a:xfrm>
+            <a:off x="7016650" y="1295400"/>
+            <a:ext cx="118616" cy="152400"/>
+          </a:xfrm>
+          <a:prstGeom prst="rect">
+            <a:avLst/>
+          </a:prstGeom>
+        </p:spPr>
+      </p:pic>
+      <p:pic>
+        <p:nvPicPr>
+          <p:cNvPr id="17" name="Picture 16" descr="image.png"/>
+          <p:cNvPicPr>
+            <a:picLocks noChangeAspect="1"/>
+          </p:cNvPicPr>
+          <p:nvPr/>
+        </p:nvPicPr>
+        <p:blipFill>
+          <a:blip r:embed="rId3"/>
+          <a:stretch>
+            <a:fillRect/>
+          </a:stretch>
+        </p:blipFill>
+        <p:spPr>
+          <a:xfrm>
+            <a:off x="3470374" y="5905500"/>
+            <a:ext cx="118616" cy="152400"/>
+          </a:xfrm>
+          <a:prstGeom prst="rect">
+            <a:avLst/>
+          </a:prstGeom>
+        </p:spPr>
+      </p:pic>
+      <p:pic>
+        <p:nvPicPr>
+          <p:cNvPr id="18" name="Picture 17" descr="image.png"/>
+          <p:cNvPicPr>
+            <a:picLocks noChangeAspect="1"/>
+          </p:cNvPicPr>
+          <p:nvPr/>
+        </p:nvPicPr>
+        <p:blipFill>
+          <a:blip r:embed="rId3"/>
+          <a:stretch>
+            <a:fillRect/>
+          </a:stretch>
+        </p:blipFill>
+        <p:spPr>
+          <a:xfrm>
+            <a:off x="6084540" y="5905500"/>
+            <a:ext cx="118616" cy="152400"/>
+          </a:xfrm>
+          <a:prstGeom prst="rect">
+            <a:avLst/>
+          </a:prstGeom>
+        </p:spPr>
+      </p:pic>
+      <p:pic>
+        <p:nvPicPr>
+          <p:cNvPr id="19" name="Picture 18" descr="image.png"/>
+          <p:cNvPicPr>
+            <a:picLocks noChangeAspect="1"/>
+          </p:cNvPicPr>
+          <p:nvPr/>
+        </p:nvPicPr>
+        <p:blipFill>
+          <a:blip r:embed="rId4"/>
+          <a:stretch>
+            <a:fillRect/>
+          </a:stretch>
+        </p:blipFill>
+        <p:spPr>
+          <a:xfrm>
+            <a:off x="1166217" y="3067050"/>
+            <a:ext cx="296465" cy="381000"/>
+          </a:xfrm>
+          <a:prstGeom prst="rect">
+            <a:avLst/>
+          </a:prstGeom>
+        </p:spPr>
+      </p:pic>
+      <p:pic>
+        <p:nvPicPr>
+          <p:cNvPr id="20" name="Picture 19" descr="image.png"/>
+          <p:cNvPicPr>
+            <a:picLocks noChangeAspect="1"/>
+          </p:cNvPicPr>
+          <p:nvPr/>
+        </p:nvPicPr>
+        <p:blipFill>
+          <a:blip r:embed="rId5"/>
+          <a:stretch>
+            <a:fillRect/>
+          </a:stretch>
+        </p:blipFill>
+        <p:spPr>
+          <a:xfrm>
+            <a:off x="2031950" y="3405187"/>
+            <a:ext cx="88999" cy="114300"/>
+          </a:xfrm>
+          <a:prstGeom prst="rect">
+            <a:avLst/>
+          </a:prstGeom>
+        </p:spPr>
+      </p:pic>
+      <p:pic>
+        <p:nvPicPr>
+          <p:cNvPr id="21" name="Picture 20" descr="image.png"/>
+          <p:cNvPicPr>
+            <a:picLocks noChangeAspect="1"/>
+          </p:cNvPicPr>
+          <p:nvPr/>
+        </p:nvPicPr>
+        <p:blipFill>
+          <a:blip r:embed="rId6"/>
+          <a:stretch>
+            <a:fillRect/>
+          </a:stretch>
+        </p:blipFill>
+        <p:spPr>
+          <a:xfrm>
+            <a:off x="3022848" y="3267075"/>
+            <a:ext cx="177849" cy="228600"/>
+          </a:xfrm>
+          <a:prstGeom prst="rect">
+            <a:avLst/>
+          </a:prstGeom>
+        </p:spPr>
+      </p:pic>
+      <p:pic>
+        <p:nvPicPr>
+          <p:cNvPr id="22" name="Picture 21" descr="image.png"/>
+          <p:cNvPicPr>
+            <a:picLocks noChangeAspect="1"/>
+          </p:cNvPicPr>
+          <p:nvPr/>
+        </p:nvPicPr>
+        <p:blipFill>
+          <a:blip r:embed="rId5"/>
+          <a:stretch>
+            <a:fillRect/>
+          </a:stretch>
+        </p:blipFill>
+        <p:spPr>
+          <a:xfrm>
+            <a:off x="4159894" y="3405187"/>
+            <a:ext cx="88999" cy="114300"/>
+          </a:xfrm>
+          <a:prstGeom prst="rect">
+            <a:avLst/>
+          </a:prstGeom>
+        </p:spPr>
+      </p:pic>
+      <p:pic>
+        <p:nvPicPr>
+          <p:cNvPr id="23" name="Picture 22" descr="image.png"/>
+          <p:cNvPicPr>
+            <a:picLocks noChangeAspect="1"/>
+          </p:cNvPicPr>
+          <p:nvPr/>
+        </p:nvPicPr>
+        <p:blipFill>
+          <a:blip r:embed="rId7"/>
+          <a:stretch>
+            <a:fillRect/>
+          </a:stretch>
+        </p:blipFill>
+        <p:spPr>
+          <a:xfrm>
+            <a:off x="5207942" y="3267075"/>
+            <a:ext cx="177849" cy="228600"/>
+          </a:xfrm>
+          <a:prstGeom prst="rect">
+            <a:avLst/>
+          </a:prstGeom>
+        </p:spPr>
+      </p:pic>
+      <p:pic>
+        <p:nvPicPr>
+          <p:cNvPr id="24" name="Picture 23" descr="image.png"/>
+          <p:cNvPicPr>
+            <a:picLocks noChangeAspect="1"/>
+          </p:cNvPicPr>
+          <p:nvPr/>
+        </p:nvPicPr>
+        <p:blipFill>
+          <a:blip r:embed="rId8"/>
+          <a:stretch>
+            <a:fillRect/>
+          </a:stretch>
+        </p:blipFill>
+        <p:spPr>
+          <a:xfrm>
+            <a:off x="6402139" y="3405187"/>
+            <a:ext cx="88999" cy="114300"/>
+          </a:xfrm>
+          <a:prstGeom prst="rect">
+            <a:avLst/>
+          </a:prstGeom>
+        </p:spPr>
+      </p:pic>
+      <p:pic>
+        <p:nvPicPr>
+          <p:cNvPr id="25" name="Picture 24" descr="image.png"/>
+          <p:cNvPicPr>
+            <a:picLocks noChangeAspect="1"/>
+          </p:cNvPicPr>
+          <p:nvPr/>
+        </p:nvPicPr>
+        <p:blipFill>
+          <a:blip r:embed="rId9"/>
+          <a:stretch>
+            <a:fillRect/>
+          </a:stretch>
+        </p:blipFill>
+        <p:spPr>
+          <a:xfrm>
+            <a:off x="7574309" y="3228975"/>
+            <a:ext cx="237083" cy="304800"/>
+          </a:xfrm>
+          <a:prstGeom prst="rect">
+            <a:avLst/>
+          </a:prstGeom>
+        </p:spPr>
+      </p:pic>
+      <p:pic>
+        <p:nvPicPr>
+          <p:cNvPr id="26" name="Picture 25" descr="image.png"/>
+          <p:cNvPicPr>
+            <a:picLocks noChangeAspect="1"/>
+          </p:cNvPicPr>
+          <p:nvPr/>
+        </p:nvPicPr>
+        <p:blipFill>
+          <a:blip r:embed="rId8"/>
+          <a:stretch>
+            <a:fillRect/>
+          </a:stretch>
+        </p:blipFill>
+        <p:spPr>
+          <a:xfrm>
+            <a:off x="9085510" y="3162300"/>
+            <a:ext cx="88999" cy="114300"/>
+          </a:xfrm>
+          <a:prstGeom prst="rect">
+            <a:avLst/>
+          </a:prstGeom>
+        </p:spPr>
+      </p:pic>
+      <p:pic>
+        <p:nvPicPr>
+          <p:cNvPr id="27" name="Picture 26" descr="image.png"/>
+          <p:cNvPicPr>
+            <a:picLocks noChangeAspect="1"/>
+          </p:cNvPicPr>
+          <p:nvPr/>
+        </p:nvPicPr>
+        <p:blipFill>
+          <a:blip r:embed="rId5"/>
+          <a:stretch>
+            <a:fillRect/>
+          </a:stretch>
+        </p:blipFill>
+        <p:spPr>
+          <a:xfrm>
+            <a:off x="9085361" y="3476625"/>
+            <a:ext cx="88999" cy="114300"/>
+          </a:xfrm>
+          <a:prstGeom prst="rect">
+            <a:avLst/>
+          </a:prstGeom>
+        </p:spPr>
+      </p:pic>
+      <p:sp>
+        <p:nvSpPr>
+          <p:cNvPr id="28" name="TextBox 27"/>
+          <p:cNvSpPr txBox="1"/>
+          <p:nvPr/>
+        </p:nvSpPr>
+        <p:spPr>
+          <a:xfrm>
+            <a:off x="609600" y="457200"/>
+            <a:ext cx="11582400" cy="419100"/>
+          </a:xfrm>
+          <a:prstGeom prst="rect">
+            <a:avLst/>
+          </a:prstGeom>
+          <a:noFill/>
+        </p:spPr>
+        <p:txBody>
+          <a:bodyPr wrap="none" lIns="0" rIns="0" tIns="0" bIns="0" anchor="t">
+            <a:spAutoFit/>
+          </a:bodyPr>
+          <a:lstStyle/>
+          <a:p>
+            <a:pPr algn="l"/>
+            <a:r>
+              <a:rPr b="1" sz="2400" i="0" u="none">
+                <a:solidFill>
+                  <a:srgbClr val="0F172A"/>
+                </a:solidFill>
+                <a:latin typeface="Noto Sans JP"/>
+              </a:rPr>
+              <a:t>システム構成図：ユーザー入力から回答出力までの流れ</a:t>
+            </a:r>
+          </a:p>
+        </p:txBody>
+      </p:sp>
+      <p:sp>
+        <p:nvSpPr>
+          <p:cNvPr id="29" name="TextBox 28"/>
+          <p:cNvSpPr txBox="1"/>
+          <p:nvPr/>
+        </p:nvSpPr>
+        <p:spPr>
+          <a:xfrm>
+            <a:off x="7016650" y="1276350"/>
+            <a:ext cx="5175349" cy="200025"/>
+          </a:xfrm>
+          <a:prstGeom prst="rect">
+            <a:avLst/>
+          </a:prstGeom>
+          <a:noFill/>
+        </p:spPr>
+        <p:txBody>
+          <a:bodyPr wrap="none" lIns="194816" rIns="0" tIns="0" bIns="0" anchor="t">
+            <a:spAutoFit/>
+          </a:bodyPr>
+          <a:lstStyle/>
+          <a:p>
+            <a:pPr algn="l"/>
+            <a:r>
+              <a:rPr b="1" sz="1200" i="0" u="none">
+                <a:solidFill>
+                  <a:srgbClr val="0369A1"/>
+                </a:solidFill>
+                <a:latin typeface="Noto Sans JP"/>
+              </a:rPr>
+              <a:t>7. セキュリティ・ガバナンス・権限管理層 (全層を一元制御)</a:t>
+            </a:r>
+          </a:p>
+        </p:txBody>
+      </p:sp>
+      <p:sp>
+        <p:nvSpPr>
+          <p:cNvPr id="30" name="TextBox 29"/>
+          <p:cNvSpPr txBox="1"/>
+          <p:nvPr/>
+        </p:nvSpPr>
+        <p:spPr>
+          <a:xfrm>
+            <a:off x="933450" y="5895975"/>
+            <a:ext cx="1238250" cy="171450"/>
+          </a:xfrm>
+          <a:prstGeom prst="rect">
+            <a:avLst/>
+          </a:prstGeom>
+          <a:noFill/>
+        </p:spPr>
+        <p:txBody>
+          <a:bodyPr wrap="none" lIns="0" rIns="0" tIns="0" bIns="0" anchor="t">
+            <a:spAutoFit/>
+          </a:bodyPr>
+          <a:lstStyle/>
+          <a:p>
+            <a:pPr algn="l"/>
+            <a:r>
+              <a:rPr b="1" sz="1050" i="0" u="none">
+                <a:solidFill>
+                  <a:srgbClr val="0284C7"/>
+                </a:solidFill>
+                <a:latin typeface="Noto Sans JP"/>
+              </a:rPr>
+              <a:t>5. データ処理層</a:t>
+            </a:r>
+          </a:p>
+        </p:txBody>
+      </p:sp>
+      <p:sp>
+        <p:nvSpPr>
+          <p:cNvPr id="31" name="TextBox 30"/>
+          <p:cNvSpPr txBox="1"/>
+          <p:nvPr/>
+        </p:nvSpPr>
+        <p:spPr>
+          <a:xfrm>
+            <a:off x="2190750" y="5886450"/>
+            <a:ext cx="1070074" cy="190500"/>
+          </a:xfrm>
+          <a:prstGeom prst="rect">
+            <a:avLst/>
+          </a:prstGeom>
+          <a:noFill/>
+        </p:spPr>
+        <p:txBody>
+          <a:bodyPr wrap="square" lIns="0" rIns="0" tIns="0" bIns="0" anchor="t">
+            <a:spAutoFit/>
+          </a:bodyPr>
+          <a:lstStyle/>
+          <a:p>
+            <a:pPr algn="l"/>
+            <a:r>
+              <a:rPr b="1" sz="1050" i="0" u="none">
+                <a:solidFill>
+                  <a:srgbClr val="0F172A"/>
+                </a:solidFill>
+                <a:latin typeface="Noto Sans JP"/>
+              </a:rPr>
+              <a:t>生データ (S3等)</a:t>
+            </a:r>
+          </a:p>
+        </p:txBody>
+      </p:sp>
+      <p:sp>
+        <p:nvSpPr>
+          <p:cNvPr id="32" name="TextBox 31"/>
+          <p:cNvSpPr txBox="1"/>
+          <p:nvPr/>
+        </p:nvSpPr>
+        <p:spPr>
+          <a:xfrm>
+            <a:off x="3893790" y="5886450"/>
+            <a:ext cx="1981200" cy="190500"/>
+          </a:xfrm>
+          <a:prstGeom prst="rect">
+            <a:avLst/>
+          </a:prstGeom>
+          <a:noFill/>
+        </p:spPr>
+        <p:txBody>
+          <a:bodyPr wrap="square" lIns="0" rIns="0" tIns="0" bIns="0" anchor="t">
+            <a:spAutoFit/>
+          </a:bodyPr>
+          <a:lstStyle/>
+          <a:p>
+            <a:pPr algn="l"/>
+            <a:r>
+              <a:rPr b="1" sz="1050" i="0" u="none">
+                <a:solidFill>
+                  <a:srgbClr val="0F172A"/>
+                </a:solidFill>
+                <a:latin typeface="Noto Sans JP"/>
+              </a:rPr>
+              <a:t>パース・チャンク化・タグ付け</a:t>
+            </a:r>
+          </a:p>
+        </p:txBody>
+      </p:sp>
+      <p:sp>
+        <p:nvSpPr>
+          <p:cNvPr id="33" name="TextBox 32"/>
+          <p:cNvSpPr txBox="1"/>
+          <p:nvPr/>
+        </p:nvSpPr>
+        <p:spPr>
+          <a:xfrm>
+            <a:off x="6355556" y="5895975"/>
+            <a:ext cx="1833562" cy="171450"/>
+          </a:xfrm>
+          <a:prstGeom prst="rect">
+            <a:avLst/>
+          </a:prstGeom>
+          <a:noFill/>
+        </p:spPr>
+        <p:txBody>
+          <a:bodyPr wrap="none" lIns="0" rIns="0" tIns="0" bIns="0" anchor="t">
+            <a:spAutoFit/>
+          </a:bodyPr>
+          <a:lstStyle/>
+          <a:p>
+            <a:pPr algn="l"/>
+            <a:r>
+              <a:rPr b="1" sz="1050" i="0" u="none">
+                <a:solidFill>
+                  <a:srgbClr val="64748B"/>
+                </a:solidFill>
+                <a:latin typeface="Noto Sans JP"/>
+              </a:rPr>
+              <a:t>ストレージ層へ定期格納</a:t>
+            </a:r>
+          </a:p>
+        </p:txBody>
+      </p:sp>
+      <p:sp>
+        <p:nvSpPr>
+          <p:cNvPr id="34" name="TextBox 33"/>
+          <p:cNvSpPr txBox="1"/>
+          <p:nvPr/>
+        </p:nvSpPr>
+        <p:spPr>
+          <a:xfrm>
+            <a:off x="790575" y="3524250"/>
+            <a:ext cx="1047750" cy="171450"/>
+          </a:xfrm>
+          <a:prstGeom prst="rect">
+            <a:avLst/>
+          </a:prstGeom>
+          <a:noFill/>
+        </p:spPr>
+        <p:txBody>
+          <a:bodyPr wrap="none" lIns="0" rIns="0" tIns="0" bIns="0" anchor="t">
+            <a:spAutoFit/>
+          </a:bodyPr>
+          <a:lstStyle/>
+          <a:p>
+            <a:pPr algn="ctr"/>
+            <a:r>
+              <a:rPr b="1" sz="1050" i="0" u="none">
+                <a:solidFill>
+                  <a:srgbClr val="0F172A"/>
+                </a:solidFill>
+                <a:latin typeface="Noto Sans JP"/>
+              </a:rPr>
+              <a:t>ユーザー</a:t>
+            </a:r>
+          </a:p>
+        </p:txBody>
+      </p:sp>
+      <p:sp>
+        <p:nvSpPr>
+          <p:cNvPr id="35" name="TextBox 34"/>
+          <p:cNvSpPr txBox="1"/>
+          <p:nvPr/>
+        </p:nvSpPr>
+        <p:spPr>
+          <a:xfrm>
+            <a:off x="1704975" y="3233737"/>
+            <a:ext cx="742950" cy="161925"/>
+          </a:xfrm>
+          <a:prstGeom prst="rect">
+            <a:avLst/>
+          </a:prstGeom>
+          <a:noFill/>
+        </p:spPr>
+        <p:txBody>
+          <a:bodyPr wrap="none" lIns="0" rIns="0" tIns="0" bIns="0" anchor="t">
+            <a:spAutoFit/>
+          </a:bodyPr>
+          <a:lstStyle/>
+          <a:p>
+            <a:pPr algn="ctr"/>
+            <a:r>
+              <a:rPr b="0" sz="900" i="0" u="none">
+                <a:solidFill>
+                  <a:srgbClr val="64748B"/>
+                </a:solidFill>
+                <a:latin typeface="Noto Sans JP"/>
+              </a:rPr>
+              <a:t>質問送信</a:t>
+            </a:r>
+          </a:p>
+        </p:txBody>
+      </p:sp>
+      <p:sp>
+        <p:nvSpPr>
+          <p:cNvPr id="36" name="TextBox 35"/>
+          <p:cNvSpPr txBox="1"/>
+          <p:nvPr/>
+        </p:nvSpPr>
+        <p:spPr>
+          <a:xfrm>
+            <a:off x="2486025" y="3019425"/>
+            <a:ext cx="1251644" cy="171450"/>
+          </a:xfrm>
+          <a:prstGeom prst="rect">
+            <a:avLst/>
+          </a:prstGeom>
+          <a:noFill/>
+        </p:spPr>
+        <p:txBody>
+          <a:bodyPr wrap="none" lIns="0" rIns="0" tIns="0" bIns="0" anchor="t">
+            <a:spAutoFit/>
+          </a:bodyPr>
+          <a:lstStyle/>
+          <a:p>
+            <a:pPr algn="ctr"/>
+            <a:r>
+              <a:rPr b="1" sz="1050" i="0" u="none">
+                <a:solidFill>
+                  <a:srgbClr val="0284C7"/>
+                </a:solidFill>
+                <a:latin typeface="Noto Sans JP"/>
+              </a:rPr>
+              <a:t>1. フロント層</a:t>
+            </a:r>
+          </a:p>
+        </p:txBody>
+      </p:sp>
+      <p:sp>
+        <p:nvSpPr>
+          <p:cNvPr id="37" name="TextBox 36"/>
+          <p:cNvSpPr txBox="1"/>
+          <p:nvPr/>
+        </p:nvSpPr>
+        <p:spPr>
+          <a:xfrm>
+            <a:off x="2486025" y="3571875"/>
+            <a:ext cx="1251644" cy="171450"/>
+          </a:xfrm>
+          <a:prstGeom prst="rect">
+            <a:avLst/>
+          </a:prstGeom>
+          <a:noFill/>
+        </p:spPr>
+        <p:txBody>
+          <a:bodyPr wrap="none" lIns="0" rIns="0" tIns="0" bIns="0" anchor="t">
+            <a:spAutoFit/>
+          </a:bodyPr>
+          <a:lstStyle/>
+          <a:p>
+            <a:pPr algn="ctr"/>
+            <a:r>
+              <a:rPr b="1" sz="1050" i="0" u="none">
+                <a:solidFill>
+                  <a:srgbClr val="0F172A"/>
+                </a:solidFill>
+                <a:latin typeface="Noto Sans JP"/>
+              </a:rPr>
+              <a:t>チャットUI</a:t>
+            </a:r>
+          </a:p>
+        </p:txBody>
+      </p:sp>
+      <p:sp>
+        <p:nvSpPr>
+          <p:cNvPr id="38" name="TextBox 37"/>
+          <p:cNvSpPr txBox="1"/>
+          <p:nvPr/>
+        </p:nvSpPr>
+        <p:spPr>
+          <a:xfrm>
+            <a:off x="3775769" y="3233737"/>
+            <a:ext cx="857250" cy="161925"/>
+          </a:xfrm>
+          <a:prstGeom prst="rect">
+            <a:avLst/>
+          </a:prstGeom>
+          <a:noFill/>
+        </p:spPr>
+        <p:txBody>
+          <a:bodyPr wrap="none" lIns="0" rIns="0" tIns="0" bIns="0" anchor="t">
+            <a:spAutoFit/>
+          </a:bodyPr>
+          <a:lstStyle/>
+          <a:p>
+            <a:pPr algn="ctr"/>
+            <a:r>
+              <a:rPr b="0" sz="900" i="0" u="none">
+                <a:solidFill>
+                  <a:srgbClr val="64748B"/>
+                </a:solidFill>
+                <a:latin typeface="Noto Sans JP"/>
+              </a:rPr>
+              <a:t>リクエスト</a:t>
+            </a:r>
+          </a:p>
+        </p:txBody>
+      </p:sp>
+      <p:sp>
+        <p:nvSpPr>
+          <p:cNvPr id="39" name="TextBox 38"/>
+          <p:cNvSpPr txBox="1"/>
+          <p:nvPr/>
+        </p:nvSpPr>
+        <p:spPr>
+          <a:xfrm>
+            <a:off x="4671119" y="3019425"/>
+            <a:ext cx="1251644" cy="171450"/>
+          </a:xfrm>
+          <a:prstGeom prst="rect">
+            <a:avLst/>
+          </a:prstGeom>
+          <a:noFill/>
+        </p:spPr>
+        <p:txBody>
+          <a:bodyPr wrap="none" lIns="0" rIns="0" tIns="0" bIns="0" anchor="t">
+            <a:spAutoFit/>
+          </a:bodyPr>
+          <a:lstStyle/>
+          <a:p>
+            <a:pPr algn="ctr"/>
+            <a:r>
+              <a:rPr b="1" sz="1050" i="0" u="none">
+                <a:solidFill>
+                  <a:srgbClr val="0284C7"/>
+                </a:solidFill>
+                <a:latin typeface="Noto Sans JP"/>
+              </a:rPr>
+              <a:t>2. API層</a:t>
+            </a:r>
+          </a:p>
+        </p:txBody>
+      </p:sp>
+      <p:sp>
+        <p:nvSpPr>
+          <p:cNvPr id="40" name="TextBox 39"/>
+          <p:cNvSpPr txBox="1"/>
+          <p:nvPr/>
+        </p:nvSpPr>
+        <p:spPr>
+          <a:xfrm>
+            <a:off x="4671119" y="3571875"/>
+            <a:ext cx="1251644" cy="171450"/>
+          </a:xfrm>
+          <a:prstGeom prst="rect">
+            <a:avLst/>
+          </a:prstGeom>
+          <a:noFill/>
+        </p:spPr>
+        <p:txBody>
+          <a:bodyPr wrap="none" lIns="0" rIns="0" tIns="0" bIns="0" anchor="t">
+            <a:spAutoFit/>
+          </a:bodyPr>
+          <a:lstStyle/>
+          <a:p>
+            <a:pPr algn="ctr"/>
+            <a:r>
+              <a:rPr b="1" sz="1050" i="0" u="none">
+                <a:solidFill>
+                  <a:srgbClr val="0F172A"/>
+                </a:solidFill>
+                <a:latin typeface="Noto Sans JP"/>
+              </a:rPr>
+              <a:t>中継・認証</a:t>
+            </a:r>
+          </a:p>
+        </p:txBody>
+      </p:sp>
+      <p:sp>
+        <p:nvSpPr>
+          <p:cNvPr id="41" name="TextBox 40"/>
+          <p:cNvSpPr txBox="1"/>
+          <p:nvPr/>
+        </p:nvSpPr>
+        <p:spPr>
+          <a:xfrm>
+            <a:off x="5960864" y="3233737"/>
+            <a:ext cx="971550" cy="161925"/>
+          </a:xfrm>
+          <a:prstGeom prst="rect">
+            <a:avLst/>
+          </a:prstGeom>
+          <a:noFill/>
+        </p:spPr>
+        <p:txBody>
+          <a:bodyPr wrap="none" lIns="0" rIns="0" tIns="0" bIns="0" anchor="t">
+            <a:spAutoFit/>
+          </a:bodyPr>
+          <a:lstStyle/>
+          <a:p>
+            <a:pPr algn="ctr"/>
+            <a:r>
+              <a:rPr b="0" sz="900" i="0" u="none">
+                <a:solidFill>
+                  <a:srgbClr val="64748B"/>
+                </a:solidFill>
+                <a:latin typeface="Noto Sans JP"/>
+              </a:rPr>
+              <a:t>ルーティング</a:t>
+            </a:r>
+          </a:p>
+        </p:txBody>
+      </p:sp>
+      <p:sp>
+        <p:nvSpPr>
+          <p:cNvPr id="42" name="TextBox 41"/>
+          <p:cNvSpPr txBox="1"/>
+          <p:nvPr/>
+        </p:nvSpPr>
+        <p:spPr>
+          <a:xfrm>
+            <a:off x="6968504" y="2809875"/>
+            <a:ext cx="1448841" cy="342900"/>
+          </a:xfrm>
+          <a:prstGeom prst="rect">
+            <a:avLst/>
+          </a:prstGeom>
+          <a:noFill/>
+        </p:spPr>
+        <p:txBody>
+          <a:bodyPr wrap="square" lIns="0" rIns="0" tIns="0" bIns="0" anchor="t">
+            <a:spAutoFit/>
+          </a:bodyPr>
+          <a:lstStyle/>
+          <a:p>
+            <a:pPr algn="ctr"/>
+            <a:r>
+              <a:rPr b="1" sz="1050" i="0" u="none">
+                <a:solidFill>
+                  <a:srgbClr val="0369A1"/>
+                </a:solidFill>
+                <a:latin typeface="Noto Sans JP"/>
+              </a:rPr>
+              <a:t>3. AIエージェント層</a:t>
+            </a:r>
+          </a:p>
+        </p:txBody>
+      </p:sp>
+      <p:sp>
+        <p:nvSpPr>
+          <p:cNvPr id="43" name="TextBox 42"/>
+          <p:cNvSpPr txBox="1"/>
+          <p:nvPr/>
+        </p:nvSpPr>
+        <p:spPr>
+          <a:xfrm>
+            <a:off x="6968504" y="3609975"/>
+            <a:ext cx="1448841" cy="342900"/>
+          </a:xfrm>
+          <a:prstGeom prst="rect">
+            <a:avLst/>
+          </a:prstGeom>
+          <a:noFill/>
+        </p:spPr>
+        <p:txBody>
+          <a:bodyPr wrap="square" lIns="0" rIns="0" tIns="0" bIns="0" anchor="t">
+            <a:spAutoFit/>
+          </a:bodyPr>
+          <a:lstStyle/>
+          <a:p>
+            <a:pPr algn="ctr"/>
+            <a:r>
+              <a:rPr b="1" sz="1050" i="0" u="none">
+                <a:solidFill>
+                  <a:srgbClr val="0F172A"/>
+                </a:solidFill>
+                <a:latin typeface="Noto Sans JP"/>
+              </a:rPr>
+              <a:t>意図解釈・ツール選択</a:t>
+            </a:r>
+          </a:p>
+        </p:txBody>
+      </p:sp>
+      <p:sp>
+        <p:nvSpPr>
+          <p:cNvPr id="44" name="TextBox 43"/>
+          <p:cNvSpPr txBox="1"/>
+          <p:nvPr/>
+        </p:nvSpPr>
+        <p:spPr>
+          <a:xfrm>
+            <a:off x="8453437" y="3143250"/>
+            <a:ext cx="863947" cy="161925"/>
+          </a:xfrm>
+          <a:prstGeom prst="rect">
+            <a:avLst/>
+          </a:prstGeom>
+          <a:noFill/>
+        </p:spPr>
+        <p:txBody>
+          <a:bodyPr wrap="none" lIns="0" rIns="0" tIns="0" bIns="0" anchor="t">
+            <a:spAutoFit/>
+          </a:bodyPr>
+          <a:lstStyle/>
+          <a:p>
+            <a:pPr algn="ctr"/>
+            <a:r>
+              <a:rPr b="0" sz="900" i="0" u="none">
+                <a:solidFill>
+                  <a:srgbClr val="64748B"/>
+                </a:solidFill>
+                <a:latin typeface="Noto Sans JP"/>
+              </a:rPr>
+              <a:t>SQL生成</a:t>
+            </a:r>
+          </a:p>
+        </p:txBody>
+      </p:sp>
+      <p:sp>
+        <p:nvSpPr>
+          <p:cNvPr id="45" name="TextBox 44"/>
+          <p:cNvSpPr txBox="1"/>
+          <p:nvPr/>
+        </p:nvSpPr>
+        <p:spPr>
+          <a:xfrm>
+            <a:off x="8453437" y="3457575"/>
+            <a:ext cx="863947" cy="161925"/>
+          </a:xfrm>
+          <a:prstGeom prst="rect">
+            <a:avLst/>
+          </a:prstGeom>
+          <a:noFill/>
+        </p:spPr>
+        <p:txBody>
+          <a:bodyPr wrap="none" lIns="0" rIns="0" tIns="0" bIns="0" anchor="t">
+            <a:spAutoFit/>
+          </a:bodyPr>
+          <a:lstStyle/>
+          <a:p>
+            <a:pPr algn="ctr"/>
+            <a:r>
+              <a:rPr b="0" sz="900" i="0" u="none">
+                <a:solidFill>
+                  <a:srgbClr val="64748B"/>
+                </a:solidFill>
+                <a:latin typeface="Noto Sans JP"/>
+              </a:rPr>
+              <a:t>検索実行</a:t>
+            </a:r>
+          </a:p>
+        </p:txBody>
+      </p:sp>
+      <p:sp>
+        <p:nvSpPr>
+          <p:cNvPr id="46" name="TextBox 45"/>
+          <p:cNvSpPr txBox="1"/>
+          <p:nvPr/>
+        </p:nvSpPr>
+        <p:spPr>
+          <a:xfrm>
+            <a:off x="9450734" y="2324100"/>
+            <a:ext cx="818257" cy="323850"/>
+          </a:xfrm>
+          <a:prstGeom prst="rect">
+            <a:avLst/>
+          </a:prstGeom>
+          <a:noFill/>
+        </p:spPr>
+        <p:txBody>
+          <a:bodyPr wrap="square" lIns="0" rIns="0" tIns="0" bIns="0" anchor="t">
+            <a:spAutoFit/>
+          </a:bodyPr>
+          <a:lstStyle/>
+          <a:p>
+            <a:pPr algn="l"/>
+            <a:r>
+              <a:rPr b="1" sz="900" i="0" u="none">
+                <a:solidFill>
+                  <a:srgbClr val="0284C7"/>
+                </a:solidFill>
+                <a:latin typeface="Noto Sans JP"/>
+              </a:rPr>
+              <a:t>4. セマンティック層</a:t>
+            </a:r>
+          </a:p>
+        </p:txBody>
+      </p:sp>
+      <p:sp>
+        <p:nvSpPr>
+          <p:cNvPr id="47" name="TextBox 46"/>
+          <p:cNvSpPr txBox="1"/>
+          <p:nvPr/>
+        </p:nvSpPr>
+        <p:spPr>
+          <a:xfrm>
+            <a:off x="9450734" y="2686050"/>
+            <a:ext cx="818257" cy="476250"/>
+          </a:xfrm>
+          <a:prstGeom prst="rect">
+            <a:avLst/>
+          </a:prstGeom>
+          <a:noFill/>
+        </p:spPr>
+        <p:txBody>
+          <a:bodyPr wrap="square" lIns="0" rIns="0" tIns="0" bIns="0" anchor="t">
+            <a:spAutoFit/>
+          </a:bodyPr>
+          <a:lstStyle/>
+          <a:p>
+            <a:pPr algn="l"/>
+            <a:r>
+              <a:rPr b="1" sz="1050" i="0" u="none">
+                <a:solidFill>
+                  <a:srgbClr val="0F172A"/>
+                </a:solidFill>
+                <a:latin typeface="Noto Sans JP"/>
+              </a:rPr>
+              <a:t>構造化抽出 (Text-to-SQL)</a:t>
+            </a:r>
+          </a:p>
+        </p:txBody>
+      </p:sp>
+      <p:sp>
+        <p:nvSpPr>
+          <p:cNvPr id="48" name="TextBox 47"/>
+          <p:cNvSpPr txBox="1"/>
+          <p:nvPr/>
+        </p:nvSpPr>
+        <p:spPr>
+          <a:xfrm>
+            <a:off x="10411866" y="2324100"/>
+            <a:ext cx="818257" cy="323850"/>
+          </a:xfrm>
+          <a:prstGeom prst="rect">
+            <a:avLst/>
+          </a:prstGeom>
+          <a:noFill/>
+        </p:spPr>
+        <p:txBody>
+          <a:bodyPr wrap="square" lIns="0" rIns="0" tIns="0" bIns="0" anchor="t">
+            <a:spAutoFit/>
+          </a:bodyPr>
+          <a:lstStyle/>
+          <a:p>
+            <a:pPr algn="l"/>
+            <a:r>
+              <a:rPr b="1" sz="900" i="0" u="none">
+                <a:solidFill>
+                  <a:srgbClr val="475569"/>
+                </a:solidFill>
+                <a:latin typeface="Noto Sans JP"/>
+              </a:rPr>
+              <a:t>6. ストレージ層</a:t>
+            </a:r>
+          </a:p>
+        </p:txBody>
+      </p:sp>
+      <p:sp>
+        <p:nvSpPr>
+          <p:cNvPr id="49" name="TextBox 48"/>
+          <p:cNvSpPr txBox="1"/>
+          <p:nvPr/>
+        </p:nvSpPr>
+        <p:spPr>
+          <a:xfrm>
+            <a:off x="10411866" y="2686050"/>
+            <a:ext cx="818257" cy="342900"/>
+          </a:xfrm>
+          <a:prstGeom prst="rect">
+            <a:avLst/>
+          </a:prstGeom>
+          <a:noFill/>
+        </p:spPr>
+        <p:txBody>
+          <a:bodyPr wrap="square" lIns="0" rIns="0" tIns="0" bIns="0" anchor="t">
+            <a:spAutoFit/>
+          </a:bodyPr>
+          <a:lstStyle/>
+          <a:p>
+            <a:pPr algn="l"/>
+            <a:r>
+              <a:rPr b="1" sz="1050" i="0" u="none">
+                <a:solidFill>
+                  <a:srgbClr val="0F172A"/>
+                </a:solidFill>
+                <a:latin typeface="Noto Sans JP"/>
+              </a:rPr>
+              <a:t>データウェアハウス</a:t>
+            </a:r>
+          </a:p>
+        </p:txBody>
+      </p:sp>
+      <p:sp>
+        <p:nvSpPr>
+          <p:cNvPr id="50" name="TextBox 49"/>
+          <p:cNvSpPr txBox="1"/>
+          <p:nvPr/>
+        </p:nvSpPr>
+        <p:spPr>
+          <a:xfrm>
+            <a:off x="9450734" y="3562350"/>
+            <a:ext cx="818257" cy="323850"/>
+          </a:xfrm>
+          <a:prstGeom prst="rect">
+            <a:avLst/>
+          </a:prstGeom>
+          <a:noFill/>
+        </p:spPr>
+        <p:txBody>
+          <a:bodyPr wrap="square" lIns="0" rIns="0" tIns="0" bIns="0" anchor="t">
+            <a:spAutoFit/>
+          </a:bodyPr>
+          <a:lstStyle/>
+          <a:p>
+            <a:pPr algn="l"/>
+            <a:r>
+              <a:rPr b="1" sz="900" i="0" u="none">
+                <a:solidFill>
+                  <a:srgbClr val="0284C7"/>
+                </a:solidFill>
+                <a:latin typeface="Noto Sans JP"/>
+              </a:rPr>
+              <a:t>4. セマンティック層</a:t>
+            </a:r>
+          </a:p>
+        </p:txBody>
+      </p:sp>
+      <p:sp>
+        <p:nvSpPr>
+          <p:cNvPr id="51" name="TextBox 50"/>
+          <p:cNvSpPr txBox="1"/>
+          <p:nvPr/>
+        </p:nvSpPr>
+        <p:spPr>
+          <a:xfrm>
+            <a:off x="9450734" y="3924300"/>
+            <a:ext cx="818257" cy="514350"/>
+          </a:xfrm>
+          <a:prstGeom prst="rect">
+            <a:avLst/>
+          </a:prstGeom>
+          <a:noFill/>
+        </p:spPr>
+        <p:txBody>
+          <a:bodyPr wrap="square" lIns="0" rIns="0" tIns="0" bIns="0" anchor="t">
+            <a:spAutoFit/>
+          </a:bodyPr>
+          <a:lstStyle/>
+          <a:p>
+            <a:pPr algn="l"/>
+            <a:r>
+              <a:rPr b="1" sz="1050" i="0" u="none">
+                <a:solidFill>
+                  <a:srgbClr val="0F172A"/>
+                </a:solidFill>
+                <a:latin typeface="Noto Sans JP"/>
+              </a:rPr>
+              <a:t>非構造化 (ベクトル検索)</a:t>
+            </a:r>
+          </a:p>
+        </p:txBody>
+      </p:sp>
+      <p:sp>
+        <p:nvSpPr>
+          <p:cNvPr id="52" name="TextBox 51"/>
+          <p:cNvSpPr txBox="1"/>
+          <p:nvPr/>
+        </p:nvSpPr>
+        <p:spPr>
+          <a:xfrm>
+            <a:off x="10411866" y="3562350"/>
+            <a:ext cx="818257" cy="323850"/>
+          </a:xfrm>
+          <a:prstGeom prst="rect">
+            <a:avLst/>
+          </a:prstGeom>
+          <a:noFill/>
+        </p:spPr>
+        <p:txBody>
+          <a:bodyPr wrap="square" lIns="0" rIns="0" tIns="0" bIns="0" anchor="t">
+            <a:spAutoFit/>
+          </a:bodyPr>
+          <a:lstStyle/>
+          <a:p>
+            <a:pPr algn="l"/>
+            <a:r>
+              <a:rPr b="1" sz="900" i="0" u="none">
+                <a:solidFill>
+                  <a:srgbClr val="475569"/>
+                </a:solidFill>
+                <a:latin typeface="Noto Sans JP"/>
+              </a:rPr>
+              <a:t>6. ストレージ層</a:t>
+            </a:r>
+          </a:p>
+        </p:txBody>
+      </p:sp>
+      <p:sp>
+        <p:nvSpPr>
+          <p:cNvPr id="53" name="TextBox 52"/>
+          <p:cNvSpPr txBox="1"/>
+          <p:nvPr/>
+        </p:nvSpPr>
+        <p:spPr>
+          <a:xfrm>
+            <a:off x="10411866" y="3924300"/>
+            <a:ext cx="818257" cy="342900"/>
+          </a:xfrm>
+          <a:prstGeom prst="rect">
+            <a:avLst/>
+          </a:prstGeom>
+          <a:noFill/>
+        </p:spPr>
+        <p:txBody>
+          <a:bodyPr wrap="square" lIns="0" rIns="0" tIns="0" bIns="0" anchor="t">
+            <a:spAutoFit/>
+          </a:bodyPr>
+          <a:lstStyle/>
+          <a:p>
+            <a:pPr algn="l"/>
+            <a:r>
+              <a:rPr b="1" sz="1050" i="0" u="none">
+                <a:solidFill>
+                  <a:srgbClr val="0F172A"/>
+                </a:solidFill>
+                <a:latin typeface="Noto Sans JP"/>
+              </a:rPr>
+              <a:t>ベクトルDB / 索引</a:t>
+            </a:r>
+          </a:p>
+        </p:txBody>
+      </p:sp>
     </p:spTree>
   </p:cSld>
   <p:clrMapOvr>
